--- a/examples/ppt/charts/charts-area.pptx
+++ b/examples/ppt/charts/charts-area.pptx
@@ -5,14 +5,14 @@
     <p:sldMasterId xmlns:r="http://schemas.openxmlformats.org/officeDocument/2006/relationships" id="2147483648" r:id="rId1"/>
   </p:sldMasterIdLst>
   <p:sldIdLst>
-    <p:sldId id="256" r:id="R8acf767bd5e64e3d"/>
-    <p:sldId id="257" r:id="R467b495e83f04945"/>
-    <p:sldId id="258" r:id="Rd31022a470974fed"/>
-    <p:sldId id="259" r:id="R43ceedb5e33046e9"/>
-    <p:sldId id="260" r:id="Ree6740b67c3945b0"/>
-    <p:sldId id="261" r:id="R3a7a459a39014ad0"/>
-    <p:sldId id="262" r:id="Rc96cb26d3def465f"/>
-    <p:sldId id="263" r:id="Ra336c60197644b9d"/>
+    <p:sldId id="256" r:id="R1e635f47288e4903"/>
+    <p:sldId id="257" r:id="R5e8ab5d3fb044273"/>
+    <p:sldId id="258" r:id="R97f496f55a9d4a1d"/>
+    <p:sldId id="259" r:id="R8fd15f3aa90f418f"/>
+    <p:sldId id="260" r:id="R22370c9d9d7f4849"/>
+    <p:sldId id="261" r:id="R05740ac31e7941ab"/>
+    <p:sldId id="262" r:id="R913863644cbe4a26"/>
+    <p:sldId id="263" r:id="Rca561261420f48ea"/>
   </p:sldIdLst>
   <p:sldSz cx="12192000" cy="6858000"/>
   <p:notesSz cx="6858000" cy="9144000"/>
@@ -287,7 +287,7 @@
 </file>
 
 <file path=ppt/slideMasters/slideMaster1.xml><?xml version="1.0" encoding="utf-8"?>
-<p:sldMaster xmlns:p="http://schemas.openxmlformats.org/presentationml/2006/main">
+<p:sldMaster xmlns:r="http://schemas.openxmlformats.org/officeDocument/2006/relationships" xmlns:p="http://schemas.openxmlformats.org/presentationml/2006/main">
   <p:cSld>
     <p:spTree>
       <p:nvGrpSpPr>
@@ -757,10 +757,12 @@
             <a:lstStyle xmlns:a="http://schemas.openxmlformats.org/drawingml/2006/main"/>
             <a:p xmlns:a="http://schemas.openxmlformats.org/drawingml/2006/main">
               <a:pPr>
-                <a:defRPr sz="900" b="0">
+                <a:defRPr sz="900">
                   <a:solidFill>
                     <a:srgbClr val="333333"/>
                   </a:solidFill>
+                  <a:latin typeface="Calibri"/>
+                  <a:ea typeface="Calibri"/>
                 </a:defRPr>
               </a:pPr>
             </a:p>
@@ -2570,7 +2572,7 @@
           <c:errBars>
             <c:errDir val="y"/>
             <c:errBarType val="both"/>
-            <c:errValType val="fixedVal"/>
+            <c:errValType val="percentage"/>
             <c:plus>
               <c:numLit>
                 <c:formatCode>General</c:formatCode>
@@ -5706,10 +5708,12 @@
             <a:lstStyle xmlns:a="http://schemas.openxmlformats.org/drawingml/2006/main"/>
             <a:p xmlns:a="http://schemas.openxmlformats.org/drawingml/2006/main">
               <a:pPr>
-                <a:defRPr sz="1000" b="0">
+                <a:defRPr sz="1000">
                   <a:solidFill>
                     <a:srgbClr val="333333"/>
                   </a:solidFill>
+                  <a:latin typeface="Calibri"/>
+                  <a:ea typeface="Calibri"/>
                 </a:defRPr>
               </a:pPr>
             </a:p>
@@ -5774,8 +5778,8 @@
       <p:grpSpPr/>
       <p:sp>
         <p:nvSpPr>
-          <p:cNvPr id="10000" name="TextBox 1"/>
-          <p:cNvSpPr/>
+          <p:cNvPr id="100000" name="TextBox 1"/>
+          <p:cNvSpPr txBox="1"/>
           <p:nvPr/>
         </p:nvSpPr>
         <p:spPr>
@@ -5802,7 +5806,7 @@
       </p:sp>
       <p:graphicFrame>
         <p:nvGraphicFramePr>
-          <p:cNvPr id="10001" name="area"/>
+          <p:cNvPr id="100001" name="area"/>
           <p:cNvGraphicFramePr/>
           <p:nvPr/>
         </p:nvGraphicFramePr>
@@ -5812,13 +5816,13 @@
         </p:xfrm>
         <a:graphic xmlns:a="http://schemas.openxmlformats.org/drawingml/2006/main">
           <a:graphicData uri="http://schemas.openxmlformats.org/drawingml/2006/chart">
-            <c:chart xmlns:r="http://schemas.openxmlformats.org/officeDocument/2006/relationships" xmlns:c="http://schemas.openxmlformats.org/drawingml/2006/chart" r:id="R7dfd6d9c1f8b4359"/>
+            <c:chart xmlns:r="http://schemas.openxmlformats.org/officeDocument/2006/relationships" xmlns:c="http://schemas.openxmlformats.org/drawingml/2006/chart" r:id="R9fd0f381928c4049"/>
           </a:graphicData>
         </a:graphic>
       </p:graphicFrame>
       <p:graphicFrame>
         <p:nvGraphicFramePr>
-          <p:cNvPr id="10002" name="stackedArea"/>
+          <p:cNvPr id="100002" name="stackedArea"/>
           <p:cNvGraphicFramePr/>
           <p:nvPr/>
         </p:nvGraphicFramePr>
@@ -5828,13 +5832,13 @@
         </p:xfrm>
         <a:graphic xmlns:a="http://schemas.openxmlformats.org/drawingml/2006/main">
           <a:graphicData uri="http://schemas.openxmlformats.org/drawingml/2006/chart">
-            <c:chart xmlns:r="http://schemas.openxmlformats.org/officeDocument/2006/relationships" xmlns:c="http://schemas.openxmlformats.org/drawingml/2006/chart" r:id="Re32b24845ff3495d"/>
+            <c:chart xmlns:r="http://schemas.openxmlformats.org/officeDocument/2006/relationships" xmlns:c="http://schemas.openxmlformats.org/drawingml/2006/chart" r:id="Ref30144486904614"/>
           </a:graphicData>
         </a:graphic>
       </p:graphicFrame>
       <p:graphicFrame>
         <p:nvGraphicFramePr>
-          <p:cNvPr id="10003" name="percentStackedArea"/>
+          <p:cNvPr id="100003" name="percentStackedArea"/>
           <p:cNvGraphicFramePr/>
           <p:nvPr/>
         </p:nvGraphicFramePr>
@@ -5844,13 +5848,13 @@
         </p:xfrm>
         <a:graphic xmlns:a="http://schemas.openxmlformats.org/drawingml/2006/main">
           <a:graphicData uri="http://schemas.openxmlformats.org/drawingml/2006/chart">
-            <c:chart xmlns:r="http://schemas.openxmlformats.org/officeDocument/2006/relationships" xmlns:c="http://schemas.openxmlformats.org/drawingml/2006/chart" r:id="Rb4fa36d31a3a423f"/>
+            <c:chart xmlns:r="http://schemas.openxmlformats.org/officeDocument/2006/relationships" xmlns:c="http://schemas.openxmlformats.org/drawingml/2006/chart" r:id="R5de66f7df3f34ecd"/>
           </a:graphicData>
         </a:graphic>
       </p:graphicFrame>
       <p:graphicFrame>
         <p:nvGraphicFramePr>
-          <p:cNvPr id="10004" name="area3d"/>
+          <p:cNvPr id="100004" name="area3d"/>
           <p:cNvGraphicFramePr/>
           <p:nvPr/>
         </p:nvGraphicFramePr>
@@ -5860,7 +5864,7 @@
         </p:xfrm>
         <a:graphic xmlns:a="http://schemas.openxmlformats.org/drawingml/2006/main">
           <a:graphicData uri="http://schemas.openxmlformats.org/drawingml/2006/chart">
-            <c:chart xmlns:r="http://schemas.openxmlformats.org/officeDocument/2006/relationships" xmlns:c="http://schemas.openxmlformats.org/drawingml/2006/chart" r:id="R229fb2874d74456d"/>
+            <c:chart xmlns:r="http://schemas.openxmlformats.org/officeDocument/2006/relationships" xmlns:c="http://schemas.openxmlformats.org/drawingml/2006/chart" r:id="R633f454643be45ec"/>
           </a:graphicData>
         </a:graphic>
       </p:graphicFrame>
@@ -5881,8 +5885,8 @@
       <p:grpSpPr/>
       <p:sp>
         <p:nvSpPr>
-          <p:cNvPr id="10005" name="TextBox 1"/>
-          <p:cNvSpPr/>
+          <p:cNvPr id="100005" name="TextBox 1"/>
+          <p:cNvSpPr txBox="1"/>
           <p:nvPr/>
         </p:nvSpPr>
         <p:spPr>
@@ -5909,7 +5913,7 @@
       </p:sp>
       <p:graphicFrame>
         <p:nvGraphicFramePr>
-          <p:cNvPr id="10006" name="Styled title"/>
+          <p:cNvPr id="100006" name="Styled title"/>
           <p:cNvGraphicFramePr/>
           <p:nvPr/>
         </p:nvGraphicFramePr>
@@ -5919,13 +5923,13 @@
         </p:xfrm>
         <a:graphic xmlns:a="http://schemas.openxmlformats.org/drawingml/2006/main">
           <a:graphicData uri="http://schemas.openxmlformats.org/drawingml/2006/chart">
-            <c:chart xmlns:r="http://schemas.openxmlformats.org/officeDocument/2006/relationships" xmlns:c="http://schemas.openxmlformats.org/drawingml/2006/chart" r:id="R404a29bf666e4ab6"/>
+            <c:chart xmlns:r="http://schemas.openxmlformats.org/officeDocument/2006/relationships" xmlns:c="http://schemas.openxmlformats.org/drawingml/2006/chart" r:id="Rdcec8d4248004810"/>
           </a:graphicData>
         </a:graphic>
       </p:graphicFrame>
       <p:graphicFrame>
         <p:nvGraphicFramePr>
-          <p:cNvPr id="10007" name="legend=top + legendFont"/>
+          <p:cNvPr id="100007" name="legend=top + legendFont"/>
           <p:cNvGraphicFramePr/>
           <p:nvPr/>
         </p:nvGraphicFramePr>
@@ -5935,13 +5939,13 @@
         </p:xfrm>
         <a:graphic xmlns:a="http://schemas.openxmlformats.org/drawingml/2006/main">
           <a:graphicData uri="http://schemas.openxmlformats.org/drawingml/2006/chart">
-            <c:chart xmlns:r="http://schemas.openxmlformats.org/officeDocument/2006/relationships" xmlns:c="http://schemas.openxmlformats.org/drawingml/2006/chart" r:id="R109ad0f1c2864794"/>
+            <c:chart xmlns:r="http://schemas.openxmlformats.org/officeDocument/2006/relationships" xmlns:c="http://schemas.openxmlformats.org/drawingml/2006/chart" r:id="Rded2ff23287748fa"/>
           </a:graphicData>
         </a:graphic>
       </p:graphicFrame>
       <p:graphicFrame>
         <p:nvGraphicFramePr>
-          <p:cNvPr id="10008" name="legend.overlay=true"/>
+          <p:cNvPr id="100008" name="legend.overlay=true"/>
           <p:cNvGraphicFramePr/>
           <p:nvPr/>
         </p:nvGraphicFramePr>
@@ -5951,13 +5955,13 @@
         </p:xfrm>
         <a:graphic xmlns:a="http://schemas.openxmlformats.org/drawingml/2006/main">
           <a:graphicData uri="http://schemas.openxmlformats.org/drawingml/2006/chart">
-            <c:chart xmlns:r="http://schemas.openxmlformats.org/officeDocument/2006/relationships" xmlns:c="http://schemas.openxmlformats.org/drawingml/2006/chart" r:id="R50be52f6d3384880"/>
+            <c:chart xmlns:r="http://schemas.openxmlformats.org/officeDocument/2006/relationships" xmlns:c="http://schemas.openxmlformats.org/drawingml/2006/chart" r:id="R3ee3303459704e54"/>
           </a:graphicData>
         </a:graphic>
       </p:graphicFrame>
       <p:graphicFrame>
         <p:nvGraphicFramePr>
-          <p:cNvPr id="10009" name="Chart 4"/>
+          <p:cNvPr id="100009" name="Chart 4"/>
           <p:cNvGraphicFramePr/>
           <p:nvPr/>
         </p:nvGraphicFramePr>
@@ -5967,7 +5971,7 @@
         </p:xfrm>
         <a:graphic xmlns:a="http://schemas.openxmlformats.org/drawingml/2006/main">
           <a:graphicData uri="http://schemas.openxmlformats.org/drawingml/2006/chart">
-            <c:chart xmlns:r="http://schemas.openxmlformats.org/officeDocument/2006/relationships" xmlns:c="http://schemas.openxmlformats.org/drawingml/2006/chart" r:id="R79424000ea0f427d"/>
+            <c:chart xmlns:r="http://schemas.openxmlformats.org/officeDocument/2006/relationships" xmlns:c="http://schemas.openxmlformats.org/drawingml/2006/chart" r:id="R9dfc2911cfad46ae"/>
           </a:graphicData>
         </a:graphic>
       </p:graphicFrame>
@@ -5988,8 +5992,8 @@
       <p:grpSpPr/>
       <p:sp>
         <p:nvSpPr>
-          <p:cNvPr id="10010" name="TextBox 1"/>
-          <p:cNvSpPr/>
+          <p:cNvPr id="100010" name="TextBox 1"/>
+          <p:cNvSpPr txBox="1"/>
           <p:nvPr/>
         </p:nvSpPr>
         <p:spPr>
@@ -6016,7 +6020,7 @@
       </p:sp>
       <p:graphicFrame>
         <p:nvGraphicFramePr>
-          <p:cNvPr id="10011" name="dataLabels=value"/>
+          <p:cNvPr id="100011" name="dataLabels=value"/>
           <p:cNvGraphicFramePr/>
           <p:nvPr/>
         </p:nvGraphicFramePr>
@@ -6026,13 +6030,13 @@
         </p:xfrm>
         <a:graphic xmlns:a="http://schemas.openxmlformats.org/drawingml/2006/main">
           <a:graphicData uri="http://schemas.openxmlformats.org/drawingml/2006/chart">
-            <c:chart xmlns:r="http://schemas.openxmlformats.org/officeDocument/2006/relationships" xmlns:c="http://schemas.openxmlformats.org/drawingml/2006/chart" r:id="Ra644117e75bd4def"/>
+            <c:chart xmlns:r="http://schemas.openxmlformats.org/officeDocument/2006/relationships" xmlns:c="http://schemas.openxmlformats.org/drawingml/2006/chart" r:id="R744ccd4f91d94a1c"/>
           </a:graphicData>
         </a:graphic>
       </p:graphicFrame>
       <p:graphicFrame>
         <p:nvGraphicFramePr>
-          <p:cNvPr id="10012" name="stacked + center labels"/>
+          <p:cNvPr id="100012" name="stacked + center labels"/>
           <p:cNvGraphicFramePr/>
           <p:nvPr/>
         </p:nvGraphicFramePr>
@@ -6042,13 +6046,13 @@
         </p:xfrm>
         <a:graphic xmlns:a="http://schemas.openxmlformats.org/drawingml/2006/main">
           <a:graphicData uri="http://schemas.openxmlformats.org/drawingml/2006/chart">
-            <c:chart xmlns:r="http://schemas.openxmlformats.org/officeDocument/2006/relationships" xmlns:c="http://schemas.openxmlformats.org/drawingml/2006/chart" r:id="R26238da29a3e4cd1"/>
+            <c:chart xmlns:r="http://schemas.openxmlformats.org/officeDocument/2006/relationships" xmlns:c="http://schemas.openxmlformats.org/drawingml/2006/chart" r:id="Rd459d6fabd8343a3"/>
           </a:graphicData>
         </a:graphic>
       </p:graphicFrame>
       <p:graphicFrame>
         <p:nvGraphicFramePr>
-          <p:cNvPr id="10013" name="value,category"/>
+          <p:cNvPr id="100013" name="value,category"/>
           <p:cNvGraphicFramePr/>
           <p:nvPr/>
         </p:nvGraphicFramePr>
@@ -6058,13 +6062,13 @@
         </p:xfrm>
         <a:graphic xmlns:a="http://schemas.openxmlformats.org/drawingml/2006/main">
           <a:graphicData uri="http://schemas.openxmlformats.org/drawingml/2006/chart">
-            <c:chart xmlns:r="http://schemas.openxmlformats.org/officeDocument/2006/relationships" xmlns:c="http://schemas.openxmlformats.org/drawingml/2006/chart" r:id="R19cba75ac2464c90"/>
+            <c:chart xmlns:r="http://schemas.openxmlformats.org/officeDocument/2006/relationships" xmlns:c="http://schemas.openxmlformats.org/drawingml/2006/chart" r:id="R3f7072fff0f34dc6"/>
           </a:graphicData>
         </a:graphic>
       </p:graphicFrame>
       <p:graphicFrame>
         <p:nvGraphicFramePr>
-          <p:cNvPr id="10014" name="dataLabels=none"/>
+          <p:cNvPr id="100014" name="dataLabels=none"/>
           <p:cNvGraphicFramePr/>
           <p:nvPr/>
         </p:nvGraphicFramePr>
@@ -6074,7 +6078,7 @@
         </p:xfrm>
         <a:graphic xmlns:a="http://schemas.openxmlformats.org/drawingml/2006/main">
           <a:graphicData uri="http://schemas.openxmlformats.org/drawingml/2006/chart">
-            <c:chart xmlns:r="http://schemas.openxmlformats.org/officeDocument/2006/relationships" xmlns:c="http://schemas.openxmlformats.org/drawingml/2006/chart" r:id="R928aab4e2c044549"/>
+            <c:chart xmlns:r="http://schemas.openxmlformats.org/officeDocument/2006/relationships" xmlns:c="http://schemas.openxmlformats.org/drawingml/2006/chart" r:id="Red8b40c105da4f7e"/>
           </a:graphicData>
         </a:graphic>
       </p:graphicFrame>
@@ -6095,8 +6099,8 @@
       <p:grpSpPr/>
       <p:sp>
         <p:nvSpPr>
-          <p:cNvPr id="10015" name="TextBox 1"/>
-          <p:cNvSpPr/>
+          <p:cNvPr id="100015" name="TextBox 1"/>
+          <p:cNvSpPr txBox="1"/>
           <p:nvPr/>
         </p:nvSpPr>
         <p:spPr>
@@ -6123,7 +6127,7 @@
       </p:sp>
       <p:graphicFrame>
         <p:nvGraphicFramePr>
-          <p:cNvPr id="10016" name="min/max + titles"/>
+          <p:cNvPr id="100016" name="min/max + titles"/>
           <p:cNvGraphicFramePr/>
           <p:nvPr/>
         </p:nvGraphicFramePr>
@@ -6133,13 +6137,13 @@
         </p:xfrm>
         <a:graphic xmlns:a="http://schemas.openxmlformats.org/drawingml/2006/main">
           <a:graphicData uri="http://schemas.openxmlformats.org/drawingml/2006/chart">
-            <c:chart xmlns:r="http://schemas.openxmlformats.org/officeDocument/2006/relationships" xmlns:c="http://schemas.openxmlformats.org/drawingml/2006/chart" r:id="R3b477bdc61514e3e"/>
+            <c:chart xmlns:r="http://schemas.openxmlformats.org/officeDocument/2006/relationships" xmlns:c="http://schemas.openxmlformats.org/drawingml/2006/chart" r:id="Rf0539b0c452f4028"/>
           </a:graphicData>
         </a:graphic>
       </p:graphicFrame>
       <p:graphicFrame>
         <p:nvGraphicFramePr>
-          <p:cNvPr id="10017" name="gridlines + ticks"/>
+          <p:cNvPr id="100017" name="gridlines + ticks"/>
           <p:cNvGraphicFramePr/>
           <p:nvPr/>
         </p:nvGraphicFramePr>
@@ -6149,13 +6153,13 @@
         </p:xfrm>
         <a:graphic xmlns:a="http://schemas.openxmlformats.org/drawingml/2006/main">
           <a:graphicData uri="http://schemas.openxmlformats.org/drawingml/2006/chart">
-            <c:chart xmlns:r="http://schemas.openxmlformats.org/officeDocument/2006/relationships" xmlns:c="http://schemas.openxmlformats.org/drawingml/2006/chart" r:id="Rbf872482176345a7"/>
+            <c:chart xmlns:r="http://schemas.openxmlformats.org/officeDocument/2006/relationships" xmlns:c="http://schemas.openxmlformats.org/drawingml/2006/chart" r:id="Reeee79b617694625"/>
           </a:graphicData>
         </a:graphic>
       </p:graphicFrame>
       <p:graphicFrame>
         <p:nvGraphicFramePr>
-          <p:cNvPr id="10018" name="labelrotation=-30"/>
+          <p:cNvPr id="100018" name="labelrotation=-30"/>
           <p:cNvGraphicFramePr/>
           <p:nvPr/>
         </p:nvGraphicFramePr>
@@ -6165,13 +6169,13 @@
         </p:xfrm>
         <a:graphic xmlns:a="http://schemas.openxmlformats.org/drawingml/2006/main">
           <a:graphicData uri="http://schemas.openxmlformats.org/drawingml/2006/chart">
-            <c:chart xmlns:r="http://schemas.openxmlformats.org/officeDocument/2006/relationships" xmlns:c="http://schemas.openxmlformats.org/drawingml/2006/chart" r:id="R4bcf28470d564b10"/>
+            <c:chart xmlns:r="http://schemas.openxmlformats.org/officeDocument/2006/relationships" xmlns:c="http://schemas.openxmlformats.org/drawingml/2006/chart" r:id="R8c4f56184d31443b"/>
           </a:graphicData>
         </a:graphic>
       </p:graphicFrame>
       <p:graphicFrame>
         <p:nvGraphicFramePr>
-          <p:cNvPr id="10019" name="dispunits=thousands"/>
+          <p:cNvPr id="100019" name="dispunits=thousands"/>
           <p:cNvGraphicFramePr/>
           <p:nvPr/>
         </p:nvGraphicFramePr>
@@ -6181,7 +6185,7 @@
         </p:xfrm>
         <a:graphic xmlns:a="http://schemas.openxmlformats.org/drawingml/2006/main">
           <a:graphicData uri="http://schemas.openxmlformats.org/drawingml/2006/chart">
-            <c:chart xmlns:r="http://schemas.openxmlformats.org/officeDocument/2006/relationships" xmlns:c="http://schemas.openxmlformats.org/drawingml/2006/chart" r:id="R9464e90d6a2749ce"/>
+            <c:chart xmlns:r="http://schemas.openxmlformats.org/officeDocument/2006/relationships" xmlns:c="http://schemas.openxmlformats.org/drawingml/2006/chart" r:id="R450e16ae62454d1a"/>
           </a:graphicData>
         </a:graphic>
       </p:graphicFrame>
@@ -6202,8 +6206,8 @@
       <p:grpSpPr/>
       <p:sp>
         <p:nvSpPr>
-          <p:cNvPr id="10020" name="TextBox 1"/>
-          <p:cNvSpPr/>
+          <p:cNvPr id="100020" name="TextBox 1"/>
+          <p:cNvSpPr txBox="1"/>
           <p:nvPr/>
         </p:nvSpPr>
         <p:spPr>
@@ -6230,7 +6234,7 @@
       </p:sp>
       <p:graphicFrame>
         <p:nvGraphicFramePr>
-          <p:cNvPr id="10021" name="colors + seriesoutline"/>
+          <p:cNvPr id="100021" name="colors + seriesoutline"/>
           <p:cNvGraphicFramePr/>
           <p:nvPr/>
         </p:nvGraphicFramePr>
@@ -6240,13 +6244,13 @@
         </p:xfrm>
         <a:graphic xmlns:a="http://schemas.openxmlformats.org/drawingml/2006/main">
           <a:graphicData uri="http://schemas.openxmlformats.org/drawingml/2006/chart">
-            <c:chart xmlns:r="http://schemas.openxmlformats.org/officeDocument/2006/relationships" xmlns:c="http://schemas.openxmlformats.org/drawingml/2006/chart" r:id="Rec5ee8aae5b4409a"/>
+            <c:chart xmlns:r="http://schemas.openxmlformats.org/officeDocument/2006/relationships" xmlns:c="http://schemas.openxmlformats.org/drawingml/2006/chart" r:id="R16519340c78f4891"/>
           </a:graphicData>
         </a:graphic>
       </p:graphicFrame>
       <p:graphicFrame>
         <p:nvGraphicFramePr>
-          <p:cNvPr id="10022" name="gradient + seriesshadow"/>
+          <p:cNvPr id="100022" name="gradient + seriesshadow"/>
           <p:cNvGraphicFramePr/>
           <p:nvPr/>
         </p:nvGraphicFramePr>
@@ -6256,13 +6260,13 @@
         </p:xfrm>
         <a:graphic xmlns:a="http://schemas.openxmlformats.org/drawingml/2006/main">
           <a:graphicData uri="http://schemas.openxmlformats.org/drawingml/2006/chart">
-            <c:chart xmlns:r="http://schemas.openxmlformats.org/officeDocument/2006/relationships" xmlns:c="http://schemas.openxmlformats.org/drawingml/2006/chart" r:id="R4bbee28fd5964ef1"/>
+            <c:chart xmlns:r="http://schemas.openxmlformats.org/officeDocument/2006/relationships" xmlns:c="http://schemas.openxmlformats.org/drawingml/2006/chart" r:id="R031ad4afb7b84ca9"/>
           </a:graphicData>
         </a:graphic>
       </p:graphicFrame>
       <p:graphicFrame>
         <p:nvGraphicFramePr>
-          <p:cNvPr id="10023" name="per-series gradients + transparency=30"/>
+          <p:cNvPr id="100023" name="per-series gradients + transparency=30"/>
           <p:cNvGraphicFramePr/>
           <p:nvPr/>
         </p:nvGraphicFramePr>
@@ -6272,13 +6276,13 @@
         </p:xfrm>
         <a:graphic xmlns:a="http://schemas.openxmlformats.org/drawingml/2006/main">
           <a:graphicData uri="http://schemas.openxmlformats.org/drawingml/2006/chart">
-            <c:chart xmlns:r="http://schemas.openxmlformats.org/officeDocument/2006/relationships" xmlns:c="http://schemas.openxmlformats.org/drawingml/2006/chart" r:id="R03e1e90768c841b8"/>
+            <c:chart xmlns:r="http://schemas.openxmlformats.org/officeDocument/2006/relationships" xmlns:c="http://schemas.openxmlformats.org/drawingml/2006/chart" r:id="Rabdb7ce055f94f2e"/>
           </a:graphicData>
         </a:graphic>
       </p:graphicFrame>
       <p:graphicFrame>
         <p:nvGraphicFramePr>
-          <p:cNvPr id="10024" name="single + transparency=50"/>
+          <p:cNvPr id="100024" name="single + transparency=50"/>
           <p:cNvGraphicFramePr/>
           <p:nvPr/>
         </p:nvGraphicFramePr>
@@ -6288,7 +6292,7 @@
         </p:xfrm>
         <a:graphic xmlns:a="http://schemas.openxmlformats.org/drawingml/2006/main">
           <a:graphicData uri="http://schemas.openxmlformats.org/drawingml/2006/chart">
-            <c:chart xmlns:r="http://schemas.openxmlformats.org/officeDocument/2006/relationships" xmlns:c="http://schemas.openxmlformats.org/drawingml/2006/chart" r:id="R566d7f317af74fa7"/>
+            <c:chart xmlns:r="http://schemas.openxmlformats.org/officeDocument/2006/relationships" xmlns:c="http://schemas.openxmlformats.org/drawingml/2006/chart" r:id="R448f0247ced84ed7"/>
           </a:graphicData>
         </a:graphic>
       </p:graphicFrame>
@@ -6309,8 +6313,8 @@
       <p:grpSpPr/>
       <p:sp>
         <p:nvSpPr>
-          <p:cNvPr id="10025" name="TextBox 1"/>
-          <p:cNvSpPr/>
+          <p:cNvPr id="100025" name="TextBox 1"/>
+          <p:cNvSpPr txBox="1"/>
           <p:nvPr/>
         </p:nvSpPr>
         <p:spPr>
@@ -6337,7 +6341,7 @@
       </p:sp>
       <p:graphicFrame>
         <p:nvGraphicFramePr>
-          <p:cNvPr id="10026" name="referenceline=60"/>
+          <p:cNvPr id="100026" name="referenceline=60"/>
           <p:cNvGraphicFramePr/>
           <p:nvPr/>
         </p:nvGraphicFramePr>
@@ -6347,13 +6351,13 @@
         </p:xfrm>
         <a:graphic xmlns:a="http://schemas.openxmlformats.org/drawingml/2006/main">
           <a:graphicData uri="http://schemas.openxmlformats.org/drawingml/2006/chart">
-            <c:chart xmlns:r="http://schemas.openxmlformats.org/officeDocument/2006/relationships" xmlns:c="http://schemas.openxmlformats.org/drawingml/2006/chart" r:id="R4918a8237f7445dd"/>
+            <c:chart xmlns:r="http://schemas.openxmlformats.org/officeDocument/2006/relationships" xmlns:c="http://schemas.openxmlformats.org/drawingml/2006/chart" r:id="Rae4ea302c0da4292"/>
           </a:graphicData>
         </a:graphic>
       </p:graphicFrame>
       <p:graphicFrame>
         <p:nvGraphicFramePr>
-          <p:cNvPr id="10027" name="errbars=percentage:10"/>
+          <p:cNvPr id="100027" name="errbars=percentage:10"/>
           <p:cNvGraphicFramePr/>
           <p:nvPr/>
         </p:nvGraphicFramePr>
@@ -6363,13 +6367,13 @@
         </p:xfrm>
         <a:graphic xmlns:a="http://schemas.openxmlformats.org/drawingml/2006/main">
           <a:graphicData uri="http://schemas.openxmlformats.org/drawingml/2006/chart">
-            <c:chart xmlns:r="http://schemas.openxmlformats.org/officeDocument/2006/relationships" xmlns:c="http://schemas.openxmlformats.org/drawingml/2006/chart" r:id="R808ce1be290c482f"/>
+            <c:chart xmlns:r="http://schemas.openxmlformats.org/officeDocument/2006/relationships" xmlns:c="http://schemas.openxmlformats.org/drawingml/2006/chart" r:id="R82dc10abd249405d"/>
           </a:graphicData>
         </a:graphic>
       </p:graphicFrame>
       <p:graphicFrame>
         <p:nvGraphicFramePr>
-          <p:cNvPr id="10028" name="trendline=linear"/>
+          <p:cNvPr id="100028" name="trendline=linear"/>
           <p:cNvGraphicFramePr/>
           <p:nvPr/>
         </p:nvGraphicFramePr>
@@ -6379,13 +6383,13 @@
         </p:xfrm>
         <a:graphic xmlns:a="http://schemas.openxmlformats.org/drawingml/2006/main">
           <a:graphicData uri="http://schemas.openxmlformats.org/drawingml/2006/chart">
-            <c:chart xmlns:r="http://schemas.openxmlformats.org/officeDocument/2006/relationships" xmlns:c="http://schemas.openxmlformats.org/drawingml/2006/chart" r:id="Rfcb3e14976c041bc"/>
+            <c:chart xmlns:r="http://schemas.openxmlformats.org/officeDocument/2006/relationships" xmlns:c="http://schemas.openxmlformats.org/drawingml/2006/chart" r:id="R978d6ba435e84d0d"/>
           </a:graphicData>
         </a:graphic>
       </p:graphicFrame>
       <p:graphicFrame>
         <p:nvGraphicFramePr>
-          <p:cNvPr id="10029" name="trendline=movingAvg:3"/>
+          <p:cNvPr id="100029" name="trendline=movingAvg:3"/>
           <p:cNvGraphicFramePr/>
           <p:nvPr/>
         </p:nvGraphicFramePr>
@@ -6395,7 +6399,7 @@
         </p:xfrm>
         <a:graphic xmlns:a="http://schemas.openxmlformats.org/drawingml/2006/main">
           <a:graphicData uri="http://schemas.openxmlformats.org/drawingml/2006/chart">
-            <c:chart xmlns:r="http://schemas.openxmlformats.org/officeDocument/2006/relationships" xmlns:c="http://schemas.openxmlformats.org/drawingml/2006/chart" r:id="R3697fb8b5e7c4a54"/>
+            <c:chart xmlns:r="http://schemas.openxmlformats.org/officeDocument/2006/relationships" xmlns:c="http://schemas.openxmlformats.org/drawingml/2006/chart" r:id="Ref96f193bbbe4b7d"/>
           </a:graphicData>
         </a:graphic>
       </p:graphicFrame>
@@ -6416,8 +6420,8 @@
       <p:grpSpPr/>
       <p:sp>
         <p:nvSpPr>
-          <p:cNvPr id="10030" name="TextBox 1"/>
-          <p:cNvSpPr/>
+          <p:cNvPr id="100030" name="TextBox 1"/>
+          <p:cNvSpPr txBox="1"/>
           <p:nvPr/>
         </p:nvSpPr>
         <p:spPr>
@@ -6444,7 +6448,7 @@
       </p:sp>
       <p:graphicFrame>
         <p:nvGraphicFramePr>
-          <p:cNvPr id="10031" name="chartareafill + plotFill + borders"/>
+          <p:cNvPr id="100031" name="chartareafill + plotFill + borders"/>
           <p:cNvGraphicFramePr/>
           <p:nvPr/>
         </p:nvGraphicFramePr>
@@ -6454,13 +6458,13 @@
         </p:xfrm>
         <a:graphic xmlns:a="http://schemas.openxmlformats.org/drawingml/2006/main">
           <a:graphicData uri="http://schemas.openxmlformats.org/drawingml/2006/chart">
-            <c:chart xmlns:r="http://schemas.openxmlformats.org/officeDocument/2006/relationships" xmlns:c="http://schemas.openxmlformats.org/drawingml/2006/chart" r:id="R7255f2ce03a84320"/>
+            <c:chart xmlns:r="http://schemas.openxmlformats.org/officeDocument/2006/relationships" xmlns:c="http://schemas.openxmlformats.org/drawingml/2006/chart" r:id="Rd05abac9e06f4139"/>
           </a:graphicData>
         </a:graphic>
       </p:graphicFrame>
       <p:graphicFrame>
         <p:nvGraphicFramePr>
-          <p:cNvPr id="10032" name="roundedcorners=true"/>
+          <p:cNvPr id="100032" name="roundedcorners=true"/>
           <p:cNvGraphicFramePr/>
           <p:nvPr/>
         </p:nvGraphicFramePr>
@@ -6470,13 +6474,13 @@
         </p:xfrm>
         <a:graphic xmlns:a="http://schemas.openxmlformats.org/drawingml/2006/main">
           <a:graphicData uri="http://schemas.openxmlformats.org/drawingml/2006/chart">
-            <c:chart xmlns:r="http://schemas.openxmlformats.org/officeDocument/2006/relationships" xmlns:c="http://schemas.openxmlformats.org/drawingml/2006/chart" r:id="Rba52fbbf57364892"/>
+            <c:chart xmlns:r="http://schemas.openxmlformats.org/officeDocument/2006/relationships" xmlns:c="http://schemas.openxmlformats.org/drawingml/2006/chart" r:id="R61e45b7f5948415a"/>
           </a:graphicData>
         </a:graphic>
       </p:graphicFrame>
       <p:graphicFrame>
         <p:nvGraphicFramePr>
-          <p:cNvPr id="10033" name="plotFill=none"/>
+          <p:cNvPr id="100033" name="plotFill=none"/>
           <p:cNvGraphicFramePr/>
           <p:nvPr/>
         </p:nvGraphicFramePr>
@@ -6486,13 +6490,13 @@
         </p:xfrm>
         <a:graphic xmlns:a="http://schemas.openxmlformats.org/drawingml/2006/main">
           <a:graphicData uri="http://schemas.openxmlformats.org/drawingml/2006/chart">
-            <c:chart xmlns:r="http://schemas.openxmlformats.org/officeDocument/2006/relationships" xmlns:c="http://schemas.openxmlformats.org/drawingml/2006/chart" r:id="R661a934709324eb4"/>
+            <c:chart xmlns:r="http://schemas.openxmlformats.org/officeDocument/2006/relationships" xmlns:c="http://schemas.openxmlformats.org/drawingml/2006/chart" r:id="Raa6ccab1e63b4fe5"/>
           </a:graphicData>
         </a:graphic>
       </p:graphicFrame>
       <p:graphicFrame>
         <p:nvGraphicFramePr>
-          <p:cNvPr id="10034" name="dataTable=true"/>
+          <p:cNvPr id="100034" name="dataTable=true"/>
           <p:cNvGraphicFramePr/>
           <p:nvPr/>
         </p:nvGraphicFramePr>
@@ -6502,7 +6506,7 @@
         </p:xfrm>
         <a:graphic xmlns:a="http://schemas.openxmlformats.org/drawingml/2006/main">
           <a:graphicData uri="http://schemas.openxmlformats.org/drawingml/2006/chart">
-            <c:chart xmlns:r="http://schemas.openxmlformats.org/officeDocument/2006/relationships" xmlns:c="http://schemas.openxmlformats.org/drawingml/2006/chart" r:id="Ra00c52e09a5a4172"/>
+            <c:chart xmlns:r="http://schemas.openxmlformats.org/officeDocument/2006/relationships" xmlns:c="http://schemas.openxmlformats.org/drawingml/2006/chart" r:id="R939f56c7b52d465e"/>
           </a:graphicData>
         </a:graphic>
       </p:graphicFrame>
@@ -6523,8 +6527,8 @@
       <p:grpSpPr/>
       <p:sp>
         <p:nvSpPr>
-          <p:cNvPr id="10035" name="TextBox 1"/>
-          <p:cNvSpPr/>
+          <p:cNvPr id="100035" name="TextBox 1"/>
+          <p:cNvSpPr txBox="1"/>
           <p:nvPr/>
         </p:nvSpPr>
         <p:spPr>
@@ -6551,7 +6555,7 @@
       </p:sp>
       <p:graphicFrame>
         <p:nvGraphicFramePr>
-          <p:cNvPr id="10036" name="preset=minimal"/>
+          <p:cNvPr id="100036" name="preset=minimal"/>
           <p:cNvGraphicFramePr/>
           <p:nvPr/>
         </p:nvGraphicFramePr>
@@ -6561,13 +6565,13 @@
         </p:xfrm>
         <a:graphic xmlns:a="http://schemas.openxmlformats.org/drawingml/2006/main">
           <a:graphicData uri="http://schemas.openxmlformats.org/drawingml/2006/chart">
-            <c:chart xmlns:r="http://schemas.openxmlformats.org/officeDocument/2006/relationships" xmlns:c="http://schemas.openxmlformats.org/drawingml/2006/chart" r:id="Re0b9c46eeb0b4a19"/>
+            <c:chart xmlns:r="http://schemas.openxmlformats.org/officeDocument/2006/relationships" xmlns:c="http://schemas.openxmlformats.org/drawingml/2006/chart" r:id="R82ad9959be6e47c4"/>
           </a:graphicData>
         </a:graphic>
       </p:graphicFrame>
       <p:graphicFrame>
         <p:nvGraphicFramePr>
-          <p:cNvPr id="10037" name="preset=dark"/>
+          <p:cNvPr id="100037" name="preset=dark"/>
           <p:cNvGraphicFramePr/>
           <p:nvPr/>
         </p:nvGraphicFramePr>
@@ -6577,13 +6581,13 @@
         </p:xfrm>
         <a:graphic xmlns:a="http://schemas.openxmlformats.org/drawingml/2006/main">
           <a:graphicData uri="http://schemas.openxmlformats.org/drawingml/2006/chart">
-            <c:chart xmlns:r="http://schemas.openxmlformats.org/officeDocument/2006/relationships" xmlns:c="http://schemas.openxmlformats.org/drawingml/2006/chart" r:id="Ra77bb809f4ea4839"/>
+            <c:chart xmlns:r="http://schemas.openxmlformats.org/officeDocument/2006/relationships" xmlns:c="http://schemas.openxmlformats.org/drawingml/2006/chart" r:id="R0f0655a6d62347b3"/>
           </a:graphicData>
         </a:graphic>
       </p:graphicFrame>
       <p:graphicFrame>
         <p:nvGraphicFramePr>
-          <p:cNvPr id="10038" name="preset=corporate"/>
+          <p:cNvPr id="100038" name="preset=corporate"/>
           <p:cNvGraphicFramePr/>
           <p:nvPr/>
         </p:nvGraphicFramePr>
@@ -6593,13 +6597,13 @@
         </p:xfrm>
         <a:graphic xmlns:a="http://schemas.openxmlformats.org/drawingml/2006/main">
           <a:graphicData uri="http://schemas.openxmlformats.org/drawingml/2006/chart">
-            <c:chart xmlns:r="http://schemas.openxmlformats.org/officeDocument/2006/relationships" xmlns:c="http://schemas.openxmlformats.org/drawingml/2006/chart" r:id="R86eb7ed53c664e51"/>
+            <c:chart xmlns:r="http://schemas.openxmlformats.org/officeDocument/2006/relationships" xmlns:c="http://schemas.openxmlformats.org/drawingml/2006/chart" r:id="R3a6ae5b016344e72"/>
           </a:graphicData>
         </a:graphic>
       </p:graphicFrame>
       <p:graphicFrame>
         <p:nvGraphicFramePr>
-          <p:cNvPr id="10039" name="seriesN.* + chart-series Set"/>
+          <p:cNvPr id="100039" name="seriesN.* + chart-series Set"/>
           <p:cNvGraphicFramePr/>
           <p:nvPr/>
         </p:nvGraphicFramePr>
@@ -6609,7 +6613,7 @@
         </p:xfrm>
         <a:graphic xmlns:a="http://schemas.openxmlformats.org/drawingml/2006/main">
           <a:graphicData uri="http://schemas.openxmlformats.org/drawingml/2006/chart">
-            <c:chart xmlns:r="http://schemas.openxmlformats.org/officeDocument/2006/relationships" xmlns:c="http://schemas.openxmlformats.org/drawingml/2006/chart" r:id="Rc1a4a3131e004aa0"/>
+            <c:chart xmlns:r="http://schemas.openxmlformats.org/officeDocument/2006/relationships" xmlns:c="http://schemas.openxmlformats.org/drawingml/2006/chart" r:id="Rdaabd6b6c3894efc"/>
           </a:graphicData>
         </a:graphic>
       </p:graphicFrame>
